--- a/assets/powerpoints/module-n2-couloirs/B1-le-plan-du-centre.pptx
+++ b/assets/powerpoints/module-n2-couloirs/B1-le-plan-du-centre.pptx
@@ -10479,7 +10479,25 @@
                 </a:solidFill>
                 <a:latin typeface="Verdana"/>
               </a:rPr>
-              <a:t>Un plan de bâtiment est fait d'&lt;b&gt;étages&lt;/b&gt;. On repère d'abord le sien, puis on cherche son endroit à l'intérieur. Chercher un numéro dans tout le plan à la fois est le meilleur moyen de ne pas le trouver.</a:t>
+              <a:t>Un plan de bâtiment est fait d'</a:t>
+            </a:r>
+            <a:r>
+              <a:rPr sz="2000" b="1" i="0">
+                <a:solidFill>
+                  <a:srgbClr val="4B4F52"/>
+                </a:solidFill>
+                <a:latin typeface="Verdana"/>
+              </a:rPr>
+              <a:t>étages</a:t>
+            </a:r>
+            <a:r>
+              <a:rPr sz="2000" b="0" i="0">
+                <a:solidFill>
+                  <a:srgbClr val="4B4F52"/>
+                </a:solidFill>
+                <a:latin typeface="Verdana"/>
+              </a:rPr>
+              <a:t>. On repère d'abord le sien, puis on cherche son endroit à l'intérieur. Chercher un numéro dans tout le plan à la fois est le meilleur moyen de ne pas le trouver.</a:t>
             </a:r>
           </a:p>
         </p:txBody>
